--- a/slides/datasets-in-10-minutes-mmmlu.pptx
+++ b/slides/datasets-in-10-minutes-mmmlu.pptx
@@ -7953,7 +7953,7 @@
         </p:nvSpPr>
         <p:spPr>
           <a:xfrm>
-            <a:off x="594360" y="1399032"/>
+            <a:off x="594360" y="1394231"/>
             <a:ext cx="7955279" cy="228600"/>
           </a:xfrm>
           <a:prstGeom prst="rect">
@@ -8007,7 +8007,7 @@
         </p:nvSpPr>
         <p:spPr>
           <a:xfrm>
-            <a:off x="594360" y="1709928"/>
+            <a:off x="594360" y="1702619"/>
             <a:ext cx="7955279" cy="658368"/>
           </a:xfrm>
           <a:prstGeom prst="rect">
@@ -8061,7 +8061,7 @@
         </p:nvSpPr>
         <p:spPr>
           <a:xfrm>
-            <a:off x="777240" y="2523744"/>
+            <a:off x="777240" y="2284131"/>
             <a:ext cx="7589520" cy="1170432"/>
           </a:xfrm>
           <a:prstGeom prst="rect">
@@ -8208,7 +8208,7 @@
         </p:nvSpPr>
         <p:spPr>
           <a:xfrm>
-            <a:off x="594360" y="3749039"/>
+            <a:off x="594360" y="3691297"/>
             <a:ext cx="7955279" cy="365760"/>
           </a:xfrm>
           <a:prstGeom prst="rect">
@@ -8262,7 +8262,7 @@
         </p:nvSpPr>
         <p:spPr>
           <a:xfrm>
-            <a:off x="594360" y="4233672"/>
+            <a:off x="594360" y="4245038"/>
             <a:ext cx="7955279" cy="292608"/>
           </a:xfrm>
           <a:prstGeom prst="rect">
@@ -22557,7 +22557,7 @@
         </p:nvSpPr>
         <p:spPr>
           <a:xfrm>
-            <a:off x="594360" y="1399032"/>
+            <a:off x="594360" y="1403783"/>
             <a:ext cx="7955279" cy="228600"/>
           </a:xfrm>
           <a:prstGeom prst="rect">
@@ -22611,7 +22611,7 @@
         </p:nvSpPr>
         <p:spPr>
           <a:xfrm>
-            <a:off x="594360" y="1709928"/>
+            <a:off x="594360" y="1712171"/>
             <a:ext cx="7955279" cy="658368"/>
           </a:xfrm>
           <a:prstGeom prst="rect">
@@ -22665,7 +22665,7 @@
         </p:nvSpPr>
         <p:spPr>
           <a:xfrm>
-            <a:off x="777240" y="2523744"/>
+            <a:off x="777240" y="2273563"/>
             <a:ext cx="7589520" cy="1170432"/>
           </a:xfrm>
           <a:prstGeom prst="rect">
@@ -22812,7 +22812,7 @@
         </p:nvSpPr>
         <p:spPr>
           <a:xfrm>
-            <a:off x="594360" y="3749039"/>
+            <a:off x="594360" y="3680728"/>
             <a:ext cx="7955279" cy="365760"/>
           </a:xfrm>
           <a:prstGeom prst="rect">
@@ -22866,7 +22866,7 @@
         </p:nvSpPr>
         <p:spPr>
           <a:xfrm>
-            <a:off x="594360" y="4233672"/>
+            <a:off x="594360" y="4234470"/>
             <a:ext cx="7955279" cy="292608"/>
           </a:xfrm>
           <a:prstGeom prst="rect">
@@ -23125,7 +23125,7 @@
         </p:nvSpPr>
         <p:spPr>
           <a:xfrm>
-            <a:off x="594360" y="1399032"/>
+            <a:off x="594360" y="1394231"/>
             <a:ext cx="7955279" cy="228600"/>
           </a:xfrm>
           <a:prstGeom prst="rect">
@@ -23179,7 +23179,7 @@
         </p:nvSpPr>
         <p:spPr>
           <a:xfrm>
-            <a:off x="594360" y="1709928"/>
+            <a:off x="594360" y="1702619"/>
             <a:ext cx="7955279" cy="658368"/>
           </a:xfrm>
           <a:prstGeom prst="rect">
@@ -23233,7 +23233,7 @@
         </p:nvSpPr>
         <p:spPr>
           <a:xfrm>
-            <a:off x="777240" y="2523744"/>
+            <a:off x="777240" y="2284131"/>
             <a:ext cx="7589520" cy="1170432"/>
           </a:xfrm>
           <a:prstGeom prst="rect">
@@ -23380,7 +23380,7 @@
         </p:nvSpPr>
         <p:spPr>
           <a:xfrm>
-            <a:off x="594360" y="3749039"/>
+            <a:off x="594360" y="3691297"/>
             <a:ext cx="7955279" cy="365760"/>
           </a:xfrm>
           <a:prstGeom prst="rect">
@@ -23434,7 +23434,7 @@
         </p:nvSpPr>
         <p:spPr>
           <a:xfrm>
-            <a:off x="594360" y="4233672"/>
+            <a:off x="594360" y="4245038"/>
             <a:ext cx="7955279" cy="292608"/>
           </a:xfrm>
           <a:prstGeom prst="rect">
@@ -23693,7 +23693,7 @@
         </p:nvSpPr>
         <p:spPr>
           <a:xfrm>
-            <a:off x="594360" y="1399032"/>
+            <a:off x="594360" y="1393724"/>
             <a:ext cx="7955279" cy="228600"/>
           </a:xfrm>
           <a:prstGeom prst="rect">
@@ -23747,7 +23747,7 @@
         </p:nvSpPr>
         <p:spPr>
           <a:xfrm>
-            <a:off x="594360" y="1709928"/>
+            <a:off x="594360" y="1702111"/>
             <a:ext cx="7955279" cy="658368"/>
           </a:xfrm>
           <a:prstGeom prst="rect">
@@ -23801,7 +23801,7 @@
         </p:nvSpPr>
         <p:spPr>
           <a:xfrm>
-            <a:off x="777240" y="2523744"/>
+            <a:off x="777240" y="2283623"/>
             <a:ext cx="7589520" cy="1170432"/>
           </a:xfrm>
           <a:prstGeom prst="rect">
@@ -23948,7 +23948,7 @@
         </p:nvSpPr>
         <p:spPr>
           <a:xfrm>
-            <a:off x="594360" y="3749039"/>
+            <a:off x="594360" y="3690789"/>
             <a:ext cx="7955279" cy="365760"/>
           </a:xfrm>
           <a:prstGeom prst="rect">
@@ -24002,7 +24002,7 @@
         </p:nvSpPr>
         <p:spPr>
           <a:xfrm>
-            <a:off x="594360" y="4233672"/>
+            <a:off x="594360" y="4244531"/>
             <a:ext cx="7955279" cy="292608"/>
           </a:xfrm>
           <a:prstGeom prst="rect">
@@ -24261,7 +24261,7 @@
         </p:nvSpPr>
         <p:spPr>
           <a:xfrm>
-            <a:off x="594360" y="1399032"/>
+            <a:off x="594360" y="1394231"/>
             <a:ext cx="7955279" cy="228600"/>
           </a:xfrm>
           <a:prstGeom prst="rect">
@@ -24315,7 +24315,7 @@
         </p:nvSpPr>
         <p:spPr>
           <a:xfrm>
-            <a:off x="594360" y="1709928"/>
+            <a:off x="594360" y="1702619"/>
             <a:ext cx="7955279" cy="658368"/>
           </a:xfrm>
           <a:prstGeom prst="rect">
@@ -24369,7 +24369,7 @@
         </p:nvSpPr>
         <p:spPr>
           <a:xfrm>
-            <a:off x="777240" y="2523744"/>
+            <a:off x="777240" y="2284131"/>
             <a:ext cx="7589520" cy="1170432"/>
           </a:xfrm>
           <a:prstGeom prst="rect">
@@ -24516,7 +24516,7 @@
         </p:nvSpPr>
         <p:spPr>
           <a:xfrm>
-            <a:off x="594360" y="3749039"/>
+            <a:off x="594360" y="3691297"/>
             <a:ext cx="7955279" cy="365760"/>
           </a:xfrm>
           <a:prstGeom prst="rect">
@@ -24570,7 +24570,7 @@
         </p:nvSpPr>
         <p:spPr>
           <a:xfrm>
-            <a:off x="594360" y="4233672"/>
+            <a:off x="594360" y="4245038"/>
             <a:ext cx="7955279" cy="292608"/>
           </a:xfrm>
           <a:prstGeom prst="rect">
@@ -24829,7 +24829,7 @@
         </p:nvSpPr>
         <p:spPr>
           <a:xfrm>
-            <a:off x="594360" y="1399032"/>
+            <a:off x="594360" y="1415348"/>
             <a:ext cx="7955279" cy="228600"/>
           </a:xfrm>
           <a:prstGeom prst="rect">
@@ -24883,7 +24883,7 @@
         </p:nvSpPr>
         <p:spPr>
           <a:xfrm>
-            <a:off x="594360" y="1709928"/>
+            <a:off x="594360" y="1700607"/>
             <a:ext cx="7955279" cy="658368"/>
           </a:xfrm>
           <a:prstGeom prst="rect">
@@ -24937,7 +24937,7 @@
         </p:nvSpPr>
         <p:spPr>
           <a:xfrm>
-            <a:off x="777240" y="2523744"/>
+            <a:off x="777240" y="2261998"/>
             <a:ext cx="7589520" cy="1170432"/>
           </a:xfrm>
           <a:prstGeom prst="rect">
@@ -25084,7 +25084,7 @@
         </p:nvSpPr>
         <p:spPr>
           <a:xfrm>
-            <a:off x="594360" y="3749039"/>
+            <a:off x="594360" y="3669164"/>
             <a:ext cx="7955279" cy="365760"/>
           </a:xfrm>
           <a:prstGeom prst="rect">
@@ -25138,7 +25138,7 @@
         </p:nvSpPr>
         <p:spPr>
           <a:xfrm>
-            <a:off x="594360" y="4233672"/>
+            <a:off x="594360" y="4222906"/>
             <a:ext cx="7955279" cy="292608"/>
           </a:xfrm>
           <a:prstGeom prst="rect">
@@ -25511,7 +25511,7 @@
         </p:nvSpPr>
         <p:spPr>
           <a:xfrm>
-            <a:off x="594360" y="1399032"/>
+            <a:off x="594360" y="1394231"/>
             <a:ext cx="7955279" cy="228600"/>
           </a:xfrm>
           <a:prstGeom prst="rect">
@@ -25565,7 +25565,7 @@
         </p:nvSpPr>
         <p:spPr>
           <a:xfrm>
-            <a:off x="594360" y="1709928"/>
+            <a:off x="594360" y="1702619"/>
             <a:ext cx="7955279" cy="658368"/>
           </a:xfrm>
           <a:prstGeom prst="rect">
@@ -25619,7 +25619,7 @@
         </p:nvSpPr>
         <p:spPr>
           <a:xfrm>
-            <a:off x="777240" y="2523744"/>
+            <a:off x="777240" y="2284131"/>
             <a:ext cx="7589520" cy="1170432"/>
           </a:xfrm>
           <a:prstGeom prst="rect">
@@ -25766,7 +25766,7 @@
         </p:nvSpPr>
         <p:spPr>
           <a:xfrm>
-            <a:off x="594360" y="3749039"/>
+            <a:off x="594360" y="3691297"/>
             <a:ext cx="7955279" cy="365760"/>
           </a:xfrm>
           <a:prstGeom prst="rect">
@@ -25820,7 +25820,7 @@
         </p:nvSpPr>
         <p:spPr>
           <a:xfrm>
-            <a:off x="594360" y="4233672"/>
+            <a:off x="594360" y="4245038"/>
             <a:ext cx="7955279" cy="292608"/>
           </a:xfrm>
           <a:prstGeom prst="rect">
@@ -26079,7 +26079,7 @@
         </p:nvSpPr>
         <p:spPr>
           <a:xfrm>
-            <a:off x="594360" y="1399032"/>
+            <a:off x="594360" y="1404419"/>
             <a:ext cx="7955279" cy="228600"/>
           </a:xfrm>
           <a:prstGeom prst="rect">
@@ -26133,7 +26133,7 @@
         </p:nvSpPr>
         <p:spPr>
           <a:xfrm>
-            <a:off x="594360" y="1709928"/>
+            <a:off x="594360" y="1712806"/>
             <a:ext cx="7955279" cy="658368"/>
           </a:xfrm>
           <a:prstGeom prst="rect">
@@ -26187,7 +26187,7 @@
         </p:nvSpPr>
         <p:spPr>
           <a:xfrm>
-            <a:off x="777240" y="2523744"/>
+            <a:off x="777240" y="2272927"/>
             <a:ext cx="7589520" cy="1170432"/>
           </a:xfrm>
           <a:prstGeom prst="rect">
@@ -26334,7 +26334,7 @@
         </p:nvSpPr>
         <p:spPr>
           <a:xfrm>
-            <a:off x="594360" y="3749039"/>
+            <a:off x="594360" y="3680093"/>
             <a:ext cx="7955279" cy="365760"/>
           </a:xfrm>
           <a:prstGeom prst="rect">
@@ -26388,7 +26388,7 @@
         </p:nvSpPr>
         <p:spPr>
           <a:xfrm>
-            <a:off x="594360" y="4233672"/>
+            <a:off x="594360" y="4233835"/>
             <a:ext cx="7955279" cy="292608"/>
           </a:xfrm>
           <a:prstGeom prst="rect">
@@ -26647,7 +26647,7 @@
         </p:nvSpPr>
         <p:spPr>
           <a:xfrm>
-            <a:off x="594360" y="1399032"/>
+            <a:off x="594360" y="1380274"/>
             <a:ext cx="7955279" cy="228600"/>
           </a:xfrm>
           <a:prstGeom prst="rect">
@@ -26701,7 +26701,7 @@
         </p:nvSpPr>
         <p:spPr>
           <a:xfrm>
-            <a:off x="594360" y="1709928"/>
+            <a:off x="594360" y="1637829"/>
             <a:ext cx="7955279" cy="658368"/>
           </a:xfrm>
           <a:prstGeom prst="rect">
@@ -26755,7 +26755,7 @@
         </p:nvSpPr>
         <p:spPr>
           <a:xfrm>
-            <a:off x="777240" y="2523744"/>
+            <a:off x="777240" y="2474567"/>
             <a:ext cx="7589520" cy="1170432"/>
           </a:xfrm>
           <a:prstGeom prst="rect">
@@ -26902,7 +26902,7 @@
         </p:nvSpPr>
         <p:spPr>
           <a:xfrm>
-            <a:off x="594360" y="3749039"/>
+            <a:off x="594360" y="3793282"/>
             <a:ext cx="7955279" cy="365760"/>
           </a:xfrm>
           <a:prstGeom prst="rect">
@@ -26956,7 +26956,7 @@
         </p:nvSpPr>
         <p:spPr>
           <a:xfrm>
-            <a:off x="594360" y="4233672"/>
+            <a:off x="594360" y="4257779"/>
             <a:ext cx="7955279" cy="292608"/>
           </a:xfrm>
           <a:prstGeom prst="rect">
@@ -27215,7 +27215,7 @@
         </p:nvSpPr>
         <p:spPr>
           <a:xfrm>
-            <a:off x="594360" y="1399032"/>
+            <a:off x="594360" y="1394231"/>
             <a:ext cx="7955279" cy="228600"/>
           </a:xfrm>
           <a:prstGeom prst="rect">
@@ -27269,7 +27269,7 @@
         </p:nvSpPr>
         <p:spPr>
           <a:xfrm>
-            <a:off x="594360" y="1709928"/>
+            <a:off x="594360" y="1702619"/>
             <a:ext cx="7955279" cy="658368"/>
           </a:xfrm>
           <a:prstGeom prst="rect">
@@ -27323,7 +27323,7 @@
         </p:nvSpPr>
         <p:spPr>
           <a:xfrm>
-            <a:off x="777240" y="2523744"/>
+            <a:off x="777240" y="2284131"/>
             <a:ext cx="7589520" cy="1170432"/>
           </a:xfrm>
           <a:prstGeom prst="rect">
@@ -27470,7 +27470,7 @@
         </p:nvSpPr>
         <p:spPr>
           <a:xfrm>
-            <a:off x="594360" y="3749039"/>
+            <a:off x="594360" y="3691297"/>
             <a:ext cx="7955279" cy="365760"/>
           </a:xfrm>
           <a:prstGeom prst="rect">
@@ -27524,7 +27524,7 @@
         </p:nvSpPr>
         <p:spPr>
           <a:xfrm>
-            <a:off x="594360" y="4233672"/>
+            <a:off x="594360" y="4245038"/>
             <a:ext cx="7955279" cy="292608"/>
           </a:xfrm>
           <a:prstGeom prst="rect">
@@ -27783,7 +27783,7 @@
         </p:nvSpPr>
         <p:spPr>
           <a:xfrm>
-            <a:off x="594360" y="1399032"/>
+            <a:off x="594360" y="1630127"/>
             <a:ext cx="7955279" cy="228600"/>
           </a:xfrm>
           <a:prstGeom prst="rect">
@@ -27837,7 +27837,7 @@
         </p:nvSpPr>
         <p:spPr>
           <a:xfrm>
-            <a:off x="594360" y="1709928"/>
+            <a:off x="594360" y="1938515"/>
             <a:ext cx="7955279" cy="658368"/>
           </a:xfrm>
           <a:prstGeom prst="rect">
@@ -27891,7 +27891,7 @@
         </p:nvSpPr>
         <p:spPr>
           <a:xfrm>
-            <a:off x="777240" y="2523744"/>
+            <a:off x="777240" y="2520028"/>
             <a:ext cx="7589520" cy="1170432"/>
           </a:xfrm>
           <a:prstGeom prst="rect">
@@ -28038,7 +28038,7 @@
         </p:nvSpPr>
         <p:spPr>
           <a:xfrm>
-            <a:off x="594360" y="3749039"/>
+            <a:off x="594360" y="3927193"/>
             <a:ext cx="7955279" cy="365760"/>
           </a:xfrm>
           <a:prstGeom prst="rect">
@@ -42999,7 +42999,7 @@
         </p:nvSpPr>
         <p:spPr>
           <a:xfrm>
-            <a:off x="594360" y="1399032"/>
+            <a:off x="594360" y="1404419"/>
             <a:ext cx="7955279" cy="228600"/>
           </a:xfrm>
           <a:prstGeom prst="rect">
@@ -43053,7 +43053,7 @@
         </p:nvSpPr>
         <p:spPr>
           <a:xfrm>
-            <a:off x="594360" y="1709928"/>
+            <a:off x="594360" y="1712806"/>
             <a:ext cx="7955279" cy="658368"/>
           </a:xfrm>
           <a:prstGeom prst="rect">
@@ -43107,7 +43107,7 @@
         </p:nvSpPr>
         <p:spPr>
           <a:xfrm>
-            <a:off x="777240" y="2523744"/>
+            <a:off x="777240" y="2272927"/>
             <a:ext cx="7589520" cy="1170432"/>
           </a:xfrm>
           <a:prstGeom prst="rect">
@@ -43254,7 +43254,7 @@
         </p:nvSpPr>
         <p:spPr>
           <a:xfrm>
-            <a:off x="594360" y="3749039"/>
+            <a:off x="594360" y="3680093"/>
             <a:ext cx="7955279" cy="365760"/>
           </a:xfrm>
           <a:prstGeom prst="rect">
@@ -43308,7 +43308,7 @@
         </p:nvSpPr>
         <p:spPr>
           <a:xfrm>
-            <a:off x="594360" y="4233672"/>
+            <a:off x="594360" y="4233835"/>
             <a:ext cx="7955279" cy="292608"/>
           </a:xfrm>
           <a:prstGeom prst="rect">
@@ -43567,7 +43567,7 @@
         </p:nvSpPr>
         <p:spPr>
           <a:xfrm>
-            <a:off x="594360" y="1399032"/>
+            <a:off x="594360" y="1380274"/>
             <a:ext cx="7955279" cy="228600"/>
           </a:xfrm>
           <a:prstGeom prst="rect">
@@ -43621,7 +43621,7 @@
         </p:nvSpPr>
         <p:spPr>
           <a:xfrm>
-            <a:off x="594360" y="1709928"/>
+            <a:off x="594360" y="1637829"/>
             <a:ext cx="7955279" cy="658368"/>
           </a:xfrm>
           <a:prstGeom prst="rect">
@@ -43675,7 +43675,7 @@
         </p:nvSpPr>
         <p:spPr>
           <a:xfrm>
-            <a:off x="777240" y="2523744"/>
+            <a:off x="777240" y="2474567"/>
             <a:ext cx="7589520" cy="1170432"/>
           </a:xfrm>
           <a:prstGeom prst="rect">
@@ -43822,7 +43822,7 @@
         </p:nvSpPr>
         <p:spPr>
           <a:xfrm>
-            <a:off x="594360" y="3749039"/>
+            <a:off x="594360" y="3793282"/>
             <a:ext cx="7955279" cy="365760"/>
           </a:xfrm>
           <a:prstGeom prst="rect">
@@ -43876,7 +43876,7 @@
         </p:nvSpPr>
         <p:spPr>
           <a:xfrm>
-            <a:off x="594360" y="4233672"/>
+            <a:off x="594360" y="4257779"/>
             <a:ext cx="7955279" cy="292608"/>
           </a:xfrm>
           <a:prstGeom prst="rect">

--- a/slides/datasets-in-10-minutes-mmmlu.pptx
+++ b/slides/datasets-in-10-minutes-mmmlu.pptx
@@ -19849,7 +19849,7 @@
                           <a:ea typeface="Noto Sans CJK JP"/>
                           <a:cs typeface="Noto Sans"/>
                         </a:rPr>
-                        <a:t>Question</a:t>
+                        <a:t>先頭の無名列</a:t>
                       </a:r>
                     </a:p>
                   </a:txBody>
@@ -19902,7 +19902,7 @@
                           <a:ea typeface="Noto Sans CJK JP"/>
                           <a:cs typeface="Noto Sans"/>
                         </a:rPr>
-                        <a:t>翻訳済みの設問本文</a:t>
+                        <a:t>科目内の番号（例：95）</a:t>
                       </a:r>
                     </a:p>
                   </a:txBody>
@@ -19957,7 +19957,7 @@
                           <a:ea typeface="Noto Sans CJK JP"/>
                           <a:cs typeface="Noto Sans"/>
                         </a:rPr>
-                        <a:t>A / B / C / D</a:t>
+                        <a:t>Question</a:t>
                       </a:r>
                     </a:p>
                   </a:txBody>
@@ -20007,7 +20007,7 @@
                           <a:ea typeface="Noto Sans CJK JP"/>
                           <a:cs typeface="Noto Sans"/>
                         </a:rPr>
-                        <a:t>四つの選択肢</a:t>
+                        <a:t>翻訳済みの設問本文</a:t>
                       </a:r>
                     </a:p>
                   </a:txBody>
@@ -20059,7 +20059,7 @@
                           <a:ea typeface="Noto Sans CJK JP"/>
                           <a:cs typeface="Noto Sans"/>
                         </a:rPr>
-                        <a:t>Answer</a:t>
+                        <a:t>A / B / C / D</a:t>
                       </a:r>
                     </a:p>
                   </a:txBody>
@@ -20109,7 +20109,7 @@
                           <a:ea typeface="Noto Sans CJK JP"/>
                           <a:cs typeface="Noto Sans"/>
                         </a:rPr>
-                        <a:t>正解を表すA〜Dの記号</a:t>
+                        <a:t>四つの選択肢</a:t>
                       </a:r>
                     </a:p>
                   </a:txBody>
@@ -20161,7 +20161,7 @@
                           <a:ea typeface="Noto Sans CJK JP"/>
                           <a:cs typeface="Noto Sans"/>
                         </a:rPr>
-                        <a:t>Subject</a:t>
+                        <a:t>Answer</a:t>
                       </a:r>
                     </a:p>
                   </a:txBody>
@@ -20211,7 +20211,7 @@
                           <a:ea typeface="Noto Sans CJK JP"/>
                           <a:cs typeface="Noto Sans"/>
                         </a:rPr>
-                        <a:t>科目名（例：machine_learning）</a:t>
+                        <a:t>正解を表すA〜Dの記号</a:t>
                       </a:r>
                     </a:p>
                   </a:txBody>
@@ -20263,7 +20263,7 @@
                           <a:ea typeface="Noto Sans CJK JP"/>
                           <a:cs typeface="Noto Sans"/>
                         </a:rPr>
-                        <a:t>先頭の無名列</a:t>
+                        <a:t>Subject</a:t>
                       </a:r>
                     </a:p>
                   </a:txBody>
@@ -20316,7 +20316,7 @@
                           <a:ea typeface="Noto Sans CJK JP"/>
                           <a:cs typeface="Noto Sans"/>
                         </a:rPr>
-                        <a:t>科目内の番号（例：95）</a:t>
+                        <a:t>科目名（例：machine_learning）</a:t>
                       </a:r>
                     </a:p>
                   </a:txBody>
@@ -20578,7 +20578,7 @@
                 <a:ea typeface="Noto Sans CJK JP"/>
                 <a:cs typeface="Noto Sans"/>
               </a:rPr>
-              <a:t>後続のGlobal MMLUは、42言語の翻訳と文化依存性の注釈を公開した。米国の制度や文化的知識を要する設問などを分析する。</a:t>
+              <a:t>後続のGlobal MMLUは、42言語の翻訳と文化依存性の注釈を公開した。米国の制度や文化的知識を要する設問などを分析している。</a:t>
             </a:r>
           </a:p>
           <a:p>
@@ -21779,7 +21779,7 @@
                 <a:ea typeface="Noto Sans CJK JP"/>
                 <a:cs typeface="Noto Sans"/>
               </a:rPr>
-              <a:t>MMMLUは、英語の知識評価MMLUを専門翻訳者が14言語へ訳した、四択問題のデータセット。各言語14,042問を配布する。</a:t>
+              <a:t>MMMLUは、英語の知識評価MMLUを専門翻訳者が14言語へ訳した、四択問題のデータセット。各言語14,042問を収録している。</a:t>
             </a:r>
           </a:p>
           <a:p>

--- a/slides/datasets-in-10-minutes-mmmlu.pptx
+++ b/slides/datasets-in-10-minutes-mmmlu.pptx
@@ -8209,7 +8209,7 @@
         <p:spPr>
           <a:xfrm>
             <a:off x="594360" y="3691297"/>
-            <a:ext cx="7955279" cy="365760"/>
+            <a:ext cx="7955279" cy="386752"/>
           </a:xfrm>
           <a:prstGeom prst="rect">
             <a:avLst/>
@@ -8224,7 +8224,7 @@
           <a:p>
             <a:pPr algn="l">
               <a:lnSpc>
-                <a:spcPct val="117000"/>
+                <a:spcPts val="2640"/>
               </a:lnSpc>
               <a:spcBef>
                 <a:spcPts val="0"/>
@@ -8241,9 +8241,9 @@
               </a:defRPr>
             </a:pPr>
             <a:r>
-              <a:rPr sz="2000" b="1" lang="ja-JP" altLang="en-US">
-                <a:solidFill>
-                  <a:srgbClr val="B13731"/>
+              <a:rPr sz="2200" b="1" lang="ja-JP" altLang="en-US">
+                <a:solidFill>
+                  <a:schemeClr val="accent1"/>
                 </a:solidFill>
                 <a:latin typeface="Noto Sans"/>
                 <a:ea typeface="Noto Sans CJK JP"/>
@@ -8777,7 +8777,7 @@
         <p:spPr>
           <a:xfrm>
             <a:off x="594360" y="3749039"/>
-            <a:ext cx="7955279" cy="365760"/>
+            <a:ext cx="7955279" cy="386617"/>
           </a:xfrm>
           <a:prstGeom prst="rect">
             <a:avLst/>
@@ -8792,7 +8792,7 @@
           <a:p>
             <a:pPr algn="l">
               <a:lnSpc>
-                <a:spcPct val="117000"/>
+                <a:spcPts val="2640"/>
               </a:lnSpc>
               <a:spcBef>
                 <a:spcPts val="0"/>
@@ -8809,9 +8809,9 @@
               </a:defRPr>
             </a:pPr>
             <a:r>
-              <a:rPr sz="2000" b="1" lang="ja-JP" altLang="en-US">
-                <a:solidFill>
-                  <a:srgbClr val="B13731"/>
+              <a:rPr sz="2200" b="1" lang="ja-JP" altLang="en-US">
+                <a:solidFill>
+                  <a:schemeClr val="accent1"/>
                 </a:solidFill>
                 <a:latin typeface="Noto Sans"/>
                 <a:ea typeface="Noto Sans CJK JP"/>
@@ -9345,7 +9345,7 @@
         <p:spPr>
           <a:xfrm>
             <a:off x="594360" y="3749039"/>
-            <a:ext cx="7955279" cy="365760"/>
+            <a:ext cx="7955279" cy="386617"/>
           </a:xfrm>
           <a:prstGeom prst="rect">
             <a:avLst/>
@@ -9360,7 +9360,7 @@
           <a:p>
             <a:pPr algn="l">
               <a:lnSpc>
-                <a:spcPct val="117000"/>
+                <a:spcPts val="2640"/>
               </a:lnSpc>
               <a:spcBef>
                 <a:spcPts val="0"/>
@@ -9377,9 +9377,9 @@
               </a:defRPr>
             </a:pPr>
             <a:r>
-              <a:rPr sz="2000" b="1" lang="ja-JP" altLang="en-US">
-                <a:solidFill>
-                  <a:srgbClr val="B13731"/>
+              <a:rPr sz="2200" b="1" lang="ja-JP" altLang="en-US">
+                <a:solidFill>
+                  <a:schemeClr val="accent1"/>
                 </a:solidFill>
                 <a:latin typeface="Noto Sans"/>
                 <a:ea typeface="Noto Sans CJK JP"/>
@@ -22813,7 +22813,7 @@
         <p:spPr>
           <a:xfrm>
             <a:off x="594360" y="3680728"/>
-            <a:ext cx="7955279" cy="365760"/>
+            <a:ext cx="7955279" cy="386526"/>
           </a:xfrm>
           <a:prstGeom prst="rect">
             <a:avLst/>
@@ -22828,7 +22828,7 @@
           <a:p>
             <a:pPr algn="l">
               <a:lnSpc>
-                <a:spcPct val="117000"/>
+                <a:spcPts val="2640"/>
               </a:lnSpc>
               <a:spcBef>
                 <a:spcPts val="0"/>
@@ -22845,9 +22845,9 @@
               </a:defRPr>
             </a:pPr>
             <a:r>
-              <a:rPr sz="2000" b="1" lang="ja-JP" altLang="en-US">
-                <a:solidFill>
-                  <a:srgbClr val="B13731"/>
+              <a:rPr sz="2200" b="1" lang="ja-JP" altLang="en-US">
+                <a:solidFill>
+                  <a:schemeClr val="accent1"/>
                 </a:solidFill>
                 <a:latin typeface="Noto Sans"/>
                 <a:ea typeface="Noto Sans CJK JP"/>
@@ -23381,7 +23381,7 @@
         <p:spPr>
           <a:xfrm>
             <a:off x="594360" y="3691297"/>
-            <a:ext cx="7955279" cy="365760"/>
+            <a:ext cx="7955279" cy="386752"/>
           </a:xfrm>
           <a:prstGeom prst="rect">
             <a:avLst/>
@@ -23396,7 +23396,7 @@
           <a:p>
             <a:pPr algn="l">
               <a:lnSpc>
-                <a:spcPct val="117000"/>
+                <a:spcPts val="2640"/>
               </a:lnSpc>
               <a:spcBef>
                 <a:spcPts val="0"/>
@@ -23413,9 +23413,9 @@
               </a:defRPr>
             </a:pPr>
             <a:r>
-              <a:rPr sz="2000" b="1" lang="ja-JP" altLang="en-US">
-                <a:solidFill>
-                  <a:srgbClr val="B13731"/>
+              <a:rPr sz="2200" b="1" lang="ja-JP" altLang="en-US">
+                <a:solidFill>
+                  <a:schemeClr val="accent1"/>
                 </a:solidFill>
                 <a:latin typeface="Noto Sans"/>
                 <a:ea typeface="Noto Sans CJK JP"/>
@@ -23949,7 +23949,7 @@
         <p:spPr>
           <a:xfrm>
             <a:off x="594360" y="3690789"/>
-            <a:ext cx="7955279" cy="365760"/>
+            <a:ext cx="7955279" cy="386549"/>
           </a:xfrm>
           <a:prstGeom prst="rect">
             <a:avLst/>
@@ -23964,7 +23964,7 @@
           <a:p>
             <a:pPr algn="l">
               <a:lnSpc>
-                <a:spcPct val="117000"/>
+                <a:spcPts val="2640"/>
               </a:lnSpc>
               <a:spcBef>
                 <a:spcPts val="0"/>
@@ -23981,9 +23981,9 @@
               </a:defRPr>
             </a:pPr>
             <a:r>
-              <a:rPr sz="2000" b="1" lang="ja-JP" altLang="en-US">
-                <a:solidFill>
-                  <a:srgbClr val="B13731"/>
+              <a:rPr sz="2200" b="1" lang="ja-JP" altLang="en-US">
+                <a:solidFill>
+                  <a:schemeClr val="accent1"/>
                 </a:solidFill>
                 <a:latin typeface="Noto Sans"/>
                 <a:ea typeface="Noto Sans CJK JP"/>
@@ -24517,7 +24517,7 @@
         <p:spPr>
           <a:xfrm>
             <a:off x="594360" y="3691297"/>
-            <a:ext cx="7955279" cy="365760"/>
+            <a:ext cx="7955279" cy="386752"/>
           </a:xfrm>
           <a:prstGeom prst="rect">
             <a:avLst/>
@@ -24532,7 +24532,7 @@
           <a:p>
             <a:pPr algn="l">
               <a:lnSpc>
-                <a:spcPct val="117000"/>
+                <a:spcPts val="2640"/>
               </a:lnSpc>
               <a:spcBef>
                 <a:spcPts val="0"/>
@@ -24549,9 +24549,9 @@
               </a:defRPr>
             </a:pPr>
             <a:r>
-              <a:rPr sz="2000" b="1" lang="ja-JP" altLang="en-US">
-                <a:solidFill>
-                  <a:srgbClr val="B13731"/>
+              <a:rPr sz="2200" b="1" lang="ja-JP" altLang="en-US">
+                <a:solidFill>
+                  <a:schemeClr val="accent1"/>
                 </a:solidFill>
                 <a:latin typeface="Noto Sans"/>
                 <a:ea typeface="Noto Sans CJK JP"/>
@@ -25085,7 +25085,7 @@
         <p:spPr>
           <a:xfrm>
             <a:off x="594360" y="3669164"/>
-            <a:ext cx="7955279" cy="365760"/>
+            <a:ext cx="7955279" cy="386572"/>
           </a:xfrm>
           <a:prstGeom prst="rect">
             <a:avLst/>
@@ -25100,7 +25100,7 @@
           <a:p>
             <a:pPr algn="l">
               <a:lnSpc>
-                <a:spcPct val="117000"/>
+                <a:spcPts val="2640"/>
               </a:lnSpc>
               <a:spcBef>
                 <a:spcPts val="0"/>
@@ -25117,9 +25117,9 @@
               </a:defRPr>
             </a:pPr>
             <a:r>
-              <a:rPr sz="2000" b="1" lang="ja-JP" altLang="en-US">
-                <a:solidFill>
-                  <a:srgbClr val="B13731"/>
+              <a:rPr sz="2200" b="1" lang="ja-JP" altLang="en-US">
+                <a:solidFill>
+                  <a:schemeClr val="accent1"/>
                 </a:solidFill>
                 <a:latin typeface="Noto Sans"/>
                 <a:ea typeface="Noto Sans CJK JP"/>
@@ -25767,7 +25767,7 @@
         <p:spPr>
           <a:xfrm>
             <a:off x="594360" y="3691297"/>
-            <a:ext cx="7955279" cy="365760"/>
+            <a:ext cx="7955279" cy="386752"/>
           </a:xfrm>
           <a:prstGeom prst="rect">
             <a:avLst/>
@@ -25782,7 +25782,7 @@
           <a:p>
             <a:pPr algn="l">
               <a:lnSpc>
-                <a:spcPct val="117000"/>
+                <a:spcPts val="2640"/>
               </a:lnSpc>
               <a:spcBef>
                 <a:spcPts val="0"/>
@@ -25799,9 +25799,9 @@
               </a:defRPr>
             </a:pPr>
             <a:r>
-              <a:rPr sz="2000" b="1" lang="ja-JP" altLang="en-US">
-                <a:solidFill>
-                  <a:srgbClr val="B13731"/>
+              <a:rPr sz="2200" b="1" lang="ja-JP" altLang="en-US">
+                <a:solidFill>
+                  <a:schemeClr val="accent1"/>
                 </a:solidFill>
                 <a:latin typeface="Noto Sans"/>
                 <a:ea typeface="Noto Sans CJK JP"/>
@@ -26335,7 +26335,7 @@
         <p:spPr>
           <a:xfrm>
             <a:off x="594360" y="3680093"/>
-            <a:ext cx="7955279" cy="365760"/>
+            <a:ext cx="7955279" cy="386437"/>
           </a:xfrm>
           <a:prstGeom prst="rect">
             <a:avLst/>
@@ -26350,7 +26350,7 @@
           <a:p>
             <a:pPr algn="l">
               <a:lnSpc>
-                <a:spcPct val="117000"/>
+                <a:spcPts val="2640"/>
               </a:lnSpc>
               <a:spcBef>
                 <a:spcPts val="0"/>
@@ -26367,9 +26367,9 @@
               </a:defRPr>
             </a:pPr>
             <a:r>
-              <a:rPr sz="2000" b="1" lang="ja-JP" altLang="en-US">
-                <a:solidFill>
-                  <a:srgbClr val="B13731"/>
+              <a:rPr sz="2200" b="1" lang="ja-JP" altLang="en-US">
+                <a:solidFill>
+                  <a:schemeClr val="accent1"/>
                 </a:solidFill>
                 <a:latin typeface="Noto Sans"/>
                 <a:ea typeface="Noto Sans CJK JP"/>
@@ -26903,7 +26903,7 @@
         <p:spPr>
           <a:xfrm>
             <a:off x="594360" y="3793282"/>
-            <a:ext cx="7955279" cy="365760"/>
+            <a:ext cx="7955279" cy="386647"/>
           </a:xfrm>
           <a:prstGeom prst="rect">
             <a:avLst/>
@@ -26918,7 +26918,7 @@
           <a:p>
             <a:pPr algn="l">
               <a:lnSpc>
-                <a:spcPct val="117000"/>
+                <a:spcPts val="2640"/>
               </a:lnSpc>
               <a:spcBef>
                 <a:spcPts val="0"/>
@@ -26935,9 +26935,9 @@
               </a:defRPr>
             </a:pPr>
             <a:r>
-              <a:rPr sz="2000" b="1" lang="ja-JP" altLang="en-US">
-                <a:solidFill>
-                  <a:srgbClr val="B13731"/>
+              <a:rPr sz="2200" b="1" lang="ja-JP" altLang="en-US">
+                <a:solidFill>
+                  <a:schemeClr val="accent1"/>
                 </a:solidFill>
                 <a:latin typeface="Noto Sans"/>
                 <a:ea typeface="Noto Sans CJK JP"/>
@@ -27471,7 +27471,7 @@
         <p:spPr>
           <a:xfrm>
             <a:off x="594360" y="3691297"/>
-            <a:ext cx="7955279" cy="365760"/>
+            <a:ext cx="7955279" cy="386752"/>
           </a:xfrm>
           <a:prstGeom prst="rect">
             <a:avLst/>
@@ -27486,7 +27486,7 @@
           <a:p>
             <a:pPr algn="l">
               <a:lnSpc>
-                <a:spcPct val="117000"/>
+                <a:spcPts val="2640"/>
               </a:lnSpc>
               <a:spcBef>
                 <a:spcPts val="0"/>
@@ -27503,9 +27503,9 @@
               </a:defRPr>
             </a:pPr>
             <a:r>
-              <a:rPr sz="2000" b="1" lang="ja-JP" altLang="en-US">
-                <a:solidFill>
-                  <a:srgbClr val="B13731"/>
+              <a:rPr sz="2200" b="1" lang="ja-JP" altLang="en-US">
+                <a:solidFill>
+                  <a:schemeClr val="accent1"/>
                 </a:solidFill>
                 <a:latin typeface="Noto Sans"/>
                 <a:ea typeface="Noto Sans CJK JP"/>
@@ -28039,7 +28039,7 @@
         <p:spPr>
           <a:xfrm>
             <a:off x="594360" y="3927193"/>
-            <a:ext cx="7955279" cy="365760"/>
+            <a:ext cx="7955279" cy="386657"/>
           </a:xfrm>
           <a:prstGeom prst="rect">
             <a:avLst/>
@@ -28054,7 +28054,7 @@
           <a:p>
             <a:pPr algn="l">
               <a:lnSpc>
-                <a:spcPct val="117000"/>
+                <a:spcPts val="2640"/>
               </a:lnSpc>
               <a:spcBef>
                 <a:spcPts val="0"/>
@@ -28071,9 +28071,9 @@
               </a:defRPr>
             </a:pPr>
             <a:r>
-              <a:rPr sz="2000" b="1" lang="ja-JP" altLang="en-US">
-                <a:solidFill>
-                  <a:srgbClr val="B13731"/>
+              <a:rPr sz="2200" b="1" lang="ja-JP" altLang="en-US">
+                <a:solidFill>
+                  <a:schemeClr val="accent1"/>
                 </a:solidFill>
                 <a:latin typeface="Noto Sans"/>
                 <a:ea typeface="Noto Sans CJK JP"/>
@@ -43255,7 +43255,7 @@
         <p:spPr>
           <a:xfrm>
             <a:off x="594360" y="3680093"/>
-            <a:ext cx="7955279" cy="365760"/>
+            <a:ext cx="7955279" cy="386437"/>
           </a:xfrm>
           <a:prstGeom prst="rect">
             <a:avLst/>
@@ -43270,7 +43270,7 @@
           <a:p>
             <a:pPr algn="l">
               <a:lnSpc>
-                <a:spcPct val="117000"/>
+                <a:spcPts val="2640"/>
               </a:lnSpc>
               <a:spcBef>
                 <a:spcPts val="0"/>
@@ -43287,9 +43287,9 @@
               </a:defRPr>
             </a:pPr>
             <a:r>
-              <a:rPr sz="2000" b="1" lang="ja-JP" altLang="en-US">
-                <a:solidFill>
-                  <a:srgbClr val="B13731"/>
+              <a:rPr sz="2200" b="1" lang="ja-JP" altLang="en-US">
+                <a:solidFill>
+                  <a:schemeClr val="accent1"/>
                 </a:solidFill>
                 <a:latin typeface="Noto Sans"/>
                 <a:ea typeface="Noto Sans CJK JP"/>
@@ -43823,7 +43823,7 @@
         <p:spPr>
           <a:xfrm>
             <a:off x="594360" y="3793282"/>
-            <a:ext cx="7955279" cy="365760"/>
+            <a:ext cx="7955279" cy="386647"/>
           </a:xfrm>
           <a:prstGeom prst="rect">
             <a:avLst/>
@@ -43838,7 +43838,7 @@
           <a:p>
             <a:pPr algn="l">
               <a:lnSpc>
-                <a:spcPct val="117000"/>
+                <a:spcPts val="2640"/>
               </a:lnSpc>
               <a:spcBef>
                 <a:spcPts val="0"/>
@@ -43855,9 +43855,9 @@
               </a:defRPr>
             </a:pPr>
             <a:r>
-              <a:rPr sz="2000" b="1" lang="ja-JP" altLang="en-US">
-                <a:solidFill>
-                  <a:srgbClr val="B13731"/>
+              <a:rPr sz="2200" b="1" lang="ja-JP" altLang="en-US">
+                <a:solidFill>
+                  <a:schemeClr val="accent1"/>
                 </a:solidFill>
                 <a:latin typeface="Noto Sans"/>
                 <a:ea typeface="Noto Sans CJK JP"/>
